--- a/docs/presentation/중간발표_2026-07-13.pptx
+++ b/docs/presentation/중간발표_2026-07-13.pptx
@@ -2239,20 +2239,6 @@
               </a:rPr>
               <a:t>중간발표</a:t>
             </a:r>
-            <a:pPr indent="0" marL="0">
-              <a:buNone/>
-            </a:pPr>
-            <a:r>
-              <a:rPr lang="en-US" sz="1400" dirty="0">
-                <a:solidFill>
-                  <a:srgbClr val="8FB0C6"/>
-                </a:solidFill>
-                <a:latin typeface="맑은 고딕" pitchFamily="34" charset="0"/>
-                <a:ea typeface="맑은 고딕" pitchFamily="34" charset="-122"/>
-                <a:cs typeface="맑은 고딕" pitchFamily="34" charset="-120"/>
-              </a:rPr>
-              <a:t>   ·   정대석   ·   KAIST 김주호 교수님 연구실</a:t>
-            </a:r>
             <a:endParaRPr lang="en-US" sz="1400" dirty="0"/>
           </a:p>
         </p:txBody>
